--- a/fixtures/sample-editor-mixed.pptx
+++ b/fixtures/sample-editor-mixed.pptx
@@ -24,6 +24,13 @@
     </a:defPPr>
   </p:defaultTextStyle>
 </p:presentation>
+</file>
+
+<file path=ppt/commentAuthors.xml><?xml version="1.0" encoding="utf-8"?>
+<p:cmAuthorLst xmlns:p="http://schemas.openxmlformats.org/presentationml/2006/main">
+  <p:cmAuthor id="0" name="审阅 &amp; Review" initials="SR" lastIdx="3" clrIdx="0"/>
+  <p:cmAuthor id="1" name="Reviewer" initials="" lastIdx="1" clrIdx="1"/>
+</p:cmAuthorLst>
 </file>
 
 <file path=ppt/charts/chart1.xml><?xml version="1.0" encoding="utf-8"?>
@@ -4120,6 +4127,571 @@
     </cx:plotArea>
   </cx:chart>
 </cx:chartSpace>
+</file>
+
+<file path=ppt/charts/chartEx2.xml><?xml version="1.0" encoding="utf-8"?>
+<cx:chartSpace xmlns:cx="http://schemas.microsoft.com/office/drawing/2014/chartex" xmlns:a="http://schemas.openxmlformats.org/drawingml/2006/main" xmlns:r="http://schemas.openxmlformats.org/officeDocument/2006/relationships">
+  <cx:chartData>
+    <cx:data id="0">
+      <cx:strDim type="cat">
+        <cx:lvl ptCount="6">
+          <cx:pt idx="0">A</cx:pt>
+          <cx:pt idx="1">B</cx:pt>
+          <cx:pt idx="2">A</cx:pt>
+          <cx:pt idx="3">A</cx:pt>
+          <cx:pt idx="4">C</cx:pt>
+        </cx:lvl>
+        <cx:lvl ptCount="6">
+          <cx:pt idx="0">Alpha</cx:pt>
+          <cx:pt idx="2">Beta</cx:pt>
+          <cx:pt idx="3">Alpha</cx:pt>
+          <cx:pt idx="5">Beta</cx:pt>
+        </cx:lvl>
+        <cx:lvl ptCount="6">
+          <cx:pt idx="0">North</cx:pt>
+          <cx:pt idx="3">South</cx:pt>
+        </cx:lvl>
+      </cx:strDim>
+      <cx:numDim type="size">
+        <cx:lvl ptCount="6">
+          <cx:pt idx="0">8</cx:pt>
+          <cx:pt idx="1">4</cx:pt>
+          <cx:pt idx="2">6</cx:pt>
+          <cx:pt idx="3">5</cx:pt>
+          <cx:pt idx="4">3</cx:pt>
+          <cx:pt idx="5">2</cx:pt>
+        </cx:lvl>
+      </cx:numDim>
+    </cx:data>
+  </cx:chartData>
+  <cx:chart>
+    <cx:title>
+      <cx:tx>
+        <cx:rich>
+          <a:bodyPr/>
+          <a:p>
+            <a:r>
+              <a:t>sunburst</a:t>
+            </a:r>
+          </a:p>
+        </cx:rich>
+      </cx:tx>
+    </cx:title>
+    <cx:plotArea>
+      <cx:plotAreaRegion>
+        <cx:series layoutId="sunburst" formatIdx="0">
+          <cx:tx>
+            <cx:txData>
+              <cx:v>Series 1</cx:v>
+            </cx:txData>
+          </cx:tx>
+          <cx:dataId val="0"/>
+          <cx:layoutPr/>
+        </cx:series>
+      </cx:plotAreaRegion>
+    </cx:plotArea>
+  </cx:chart>
+</cx:chartSpace>
+</file>
+
+<file path=ppt/charts/chartEx3.xml><?xml version="1.0" encoding="utf-8"?>
+<cx:chartSpace xmlns:cx="http://schemas.microsoft.com/office/drawing/2014/chartex" xmlns:a="http://schemas.openxmlformats.org/drawingml/2006/main" xmlns:r="http://schemas.openxmlformats.org/officeDocument/2006/relationships">
+  <cx:chartData>
+    <cx:data id="0">
+      <cx:strDim type="cat">
+        <cx:lvl ptCount="10">
+          <cx:pt idx="0">Point 1</cx:pt>
+          <cx:pt idx="1">Point 2</cx:pt>
+          <cx:pt idx="2">Point 3</cx:pt>
+          <cx:pt idx="3">Point 4</cx:pt>
+          <cx:pt idx="4">Point 5</cx:pt>
+          <cx:pt idx="5">Point 6</cx:pt>
+          <cx:pt idx="6">Point 7</cx:pt>
+          <cx:pt idx="7">Point 8</cx:pt>
+          <cx:pt idx="8">Point 9</cx:pt>
+          <cx:pt idx="9">Point 10</cx:pt>
+        </cx:lvl>
+      </cx:strDim>
+      <cx:numDim type="val">
+        <cx:lvl ptCount="10">
+          <cx:pt idx="0">1</cx:pt>
+          <cx:pt idx="1">1</cx:pt>
+          <cx:pt idx="2">2</cx:pt>
+          <cx:pt idx="3">3</cx:pt>
+          <cx:pt idx="4">3</cx:pt>
+          <cx:pt idx="5">3</cx:pt>
+          <cx:pt idx="6">4</cx:pt>
+          <cx:pt idx="7">4</cx:pt>
+          <cx:pt idx="8">5</cx:pt>
+          <cx:pt idx="9">8</cx:pt>
+        </cx:lvl>
+      </cx:numDim>
+    </cx:data>
+  </cx:chartData>
+  <cx:chart>
+    <cx:title>
+      <cx:tx>
+        <cx:rich>
+          <a:bodyPr/>
+          <a:p>
+            <a:r>
+              <a:t>histogram</a:t>
+            </a:r>
+          </a:p>
+        </cx:rich>
+      </cx:tx>
+    </cx:title>
+    <cx:plotArea>
+      <cx:plotAreaRegion>
+        <cx:series layoutId="clusteredColumn" formatIdx="0">
+          <cx:tx>
+            <cx:txData>
+              <cx:v>Series 1</cx:v>
+            </cx:txData>
+          </cx:tx>
+          <cx:dataId val="0"/>
+          <cx:layoutPr>
+            <cx:binning intervalClosed="r">
+              <cx:binSize>2</cx:binSize>
+            </cx:binning>
+          </cx:layoutPr>
+        </cx:series>
+      </cx:plotAreaRegion>
+    </cx:plotArea>
+  </cx:chart>
+</cx:chartSpace>
+</file>
+
+<file path=ppt/charts/chartEx4.xml><?xml version="1.0" encoding="utf-8"?>
+<cx:chartSpace xmlns:cx="http://schemas.microsoft.com/office/drawing/2014/chartex" xmlns:a="http://schemas.openxmlformats.org/drawingml/2006/main" xmlns:r="http://schemas.openxmlformats.org/officeDocument/2006/relationships">
+  <cx:chartData>
+    <cx:data id="0">
+      <cx:strDim type="cat">
+        <cx:lvl ptCount="10">
+          <cx:pt idx="0">Point 1</cx:pt>
+          <cx:pt idx="1">Point 2</cx:pt>
+          <cx:pt idx="2">Point 3</cx:pt>
+          <cx:pt idx="3">Point 4</cx:pt>
+          <cx:pt idx="4">Point 5</cx:pt>
+          <cx:pt idx="5">Point 6</cx:pt>
+          <cx:pt idx="6">Point 7</cx:pt>
+          <cx:pt idx="7">Point 8</cx:pt>
+          <cx:pt idx="8">Point 9</cx:pt>
+          <cx:pt idx="9">Point 10</cx:pt>
+        </cx:lvl>
+      </cx:strDim>
+      <cx:numDim type="val">
+        <cx:lvl ptCount="10">
+          <cx:pt idx="0">1</cx:pt>
+          <cx:pt idx="1">1</cx:pt>
+          <cx:pt idx="2">2</cx:pt>
+          <cx:pt idx="3">3</cx:pt>
+          <cx:pt idx="4">3</cx:pt>
+          <cx:pt idx="5">3</cx:pt>
+          <cx:pt idx="6">4</cx:pt>
+          <cx:pt idx="7">4</cx:pt>
+          <cx:pt idx="8">5</cx:pt>
+          <cx:pt idx="9">8</cx:pt>
+        </cx:lvl>
+      </cx:numDim>
+    </cx:data>
+  </cx:chartData>
+  <cx:chart>
+    <cx:title>
+      <cx:tx>
+        <cx:rich>
+          <a:bodyPr/>
+          <a:p>
+            <a:r>
+              <a:t>pareto</a:t>
+            </a:r>
+          </a:p>
+        </cx:rich>
+      </cx:tx>
+    </cx:title>
+    <cx:plotArea>
+      <cx:plotAreaRegion>
+        <cx:series layoutId="clusteredColumn" formatIdx="0">
+          <cx:tx>
+            <cx:txData>
+              <cx:v>Series 1</cx:v>
+            </cx:txData>
+          </cx:tx>
+          <cx:dataId val="0"/>
+          <cx:layoutPr>
+            <cx:binning intervalClosed="r">
+              <cx:binSize>2</cx:binSize>
+            </cx:binning>
+          </cx:layoutPr>
+        </cx:series>
+        <cx:series layoutId="paretoLine" ownerIdx="0"/>
+      </cx:plotAreaRegion>
+    </cx:plotArea>
+  </cx:chart>
+</cx:chartSpace>
+</file>
+
+<file path=ppt/charts/chartEx5.xml><?xml version="1.0" encoding="utf-8"?>
+<cx:chartSpace xmlns:cx="http://schemas.microsoft.com/office/drawing/2014/chartex" xmlns:a="http://schemas.openxmlformats.org/drawingml/2006/main" xmlns:r="http://schemas.openxmlformats.org/officeDocument/2006/relationships">
+  <cx:chartData>
+    <cx:data id="0">
+      <cx:strDim type="cat">
+        <cx:lvl ptCount="10">
+          <cx:pt idx="0">Point 1</cx:pt>
+          <cx:pt idx="1">Point 2</cx:pt>
+          <cx:pt idx="2">Point 3</cx:pt>
+          <cx:pt idx="3">Point 4</cx:pt>
+          <cx:pt idx="4">Point 5</cx:pt>
+          <cx:pt idx="5">Point 6</cx:pt>
+          <cx:pt idx="6">Point 7</cx:pt>
+          <cx:pt idx="7">Point 8</cx:pt>
+          <cx:pt idx="8">Point 9</cx:pt>
+          <cx:pt idx="9">Point 10</cx:pt>
+        </cx:lvl>
+      </cx:strDim>
+      <cx:numDim type="val">
+        <cx:lvl ptCount="10">
+          <cx:pt idx="0">1</cx:pt>
+          <cx:pt idx="1">1</cx:pt>
+          <cx:pt idx="2">2</cx:pt>
+          <cx:pt idx="3">3</cx:pt>
+          <cx:pt idx="4">3</cx:pt>
+          <cx:pt idx="5">3</cx:pt>
+          <cx:pt idx="6">4</cx:pt>
+          <cx:pt idx="7">4</cx:pt>
+          <cx:pt idx="8">5</cx:pt>
+          <cx:pt idx="9">8</cx:pt>
+        </cx:lvl>
+      </cx:numDim>
+    </cx:data>
+    <cx:data id="1">
+      <cx:strDim type="cat">
+        <cx:lvl ptCount="10">
+          <cx:pt idx="0">Point 1</cx:pt>
+          <cx:pt idx="1">Point 2</cx:pt>
+          <cx:pt idx="2">Point 3</cx:pt>
+          <cx:pt idx="3">Point 4</cx:pt>
+          <cx:pt idx="4">Point 5</cx:pt>
+          <cx:pt idx="5">Point 6</cx:pt>
+          <cx:pt idx="6">Point 7</cx:pt>
+          <cx:pt idx="7">Point 8</cx:pt>
+          <cx:pt idx="8">Point 9</cx:pt>
+          <cx:pt idx="9">Point 10</cx:pt>
+        </cx:lvl>
+      </cx:strDim>
+      <cx:numDim type="val">
+        <cx:lvl ptCount="10">
+          <cx:pt idx="0">2</cx:pt>
+          <cx:pt idx="1">2</cx:pt>
+          <cx:pt idx="2">3</cx:pt>
+          <cx:pt idx="3">4</cx:pt>
+          <cx:pt idx="4">4</cx:pt>
+          <cx:pt idx="5">4</cx:pt>
+          <cx:pt idx="6">5</cx:pt>
+          <cx:pt idx="7">5</cx:pt>
+          <cx:pt idx="8">6</cx:pt>
+          <cx:pt idx="9">9</cx:pt>
+        </cx:lvl>
+      </cx:numDim>
+    </cx:data>
+    <cx:data id="2">
+      <cx:strDim type="cat">
+        <cx:lvl ptCount="10">
+          <cx:pt idx="0">Point 1</cx:pt>
+          <cx:pt idx="1">Point 2</cx:pt>
+          <cx:pt idx="2">Point 3</cx:pt>
+          <cx:pt idx="3">Point 4</cx:pt>
+          <cx:pt idx="4">Point 5</cx:pt>
+          <cx:pt idx="5">Point 6</cx:pt>
+          <cx:pt idx="6">Point 7</cx:pt>
+          <cx:pt idx="7">Point 8</cx:pt>
+          <cx:pt idx="8">Point 9</cx:pt>
+          <cx:pt idx="9">Point 10</cx:pt>
+        </cx:lvl>
+      </cx:strDim>
+      <cx:numDim type="val">
+        <cx:lvl ptCount="10">
+          <cx:pt idx="0">3</cx:pt>
+          <cx:pt idx="1">3</cx:pt>
+          <cx:pt idx="2">4</cx:pt>
+          <cx:pt idx="3">5</cx:pt>
+          <cx:pt idx="4">5</cx:pt>
+          <cx:pt idx="5">5</cx:pt>
+          <cx:pt idx="6">6</cx:pt>
+          <cx:pt idx="7">6</cx:pt>
+          <cx:pt idx="8">7</cx:pt>
+          <cx:pt idx="9">10</cx:pt>
+        </cx:lvl>
+      </cx:numDim>
+    </cx:data>
+  </cx:chartData>
+  <cx:chart>
+    <cx:title>
+      <cx:tx>
+        <cx:rich>
+          <a:bodyPr/>
+          <a:p>
+            <a:r>
+              <a:t>boxWhisker</a:t>
+            </a:r>
+          </a:p>
+        </cx:rich>
+      </cx:tx>
+    </cx:title>
+    <cx:plotArea>
+      <cx:plotAreaRegion>
+        <cx:series layoutId="boxWhisker" formatIdx="0">
+          <cx:tx>
+            <cx:txData>
+              <cx:v>Series 1</cx:v>
+            </cx:txData>
+          </cx:tx>
+          <cx:dataId val="0"/>
+          <cx:layoutPr>
+            <cx:statistics quartileMethod="exclusive"/>
+          </cx:layoutPr>
+        </cx:series>
+        <cx:series layoutId="boxWhisker" formatIdx="1">
+          <cx:tx>
+            <cx:txData>
+              <cx:v>Series 2</cx:v>
+            </cx:txData>
+          </cx:tx>
+          <cx:dataId val="1"/>
+          <cx:layoutPr>
+            <cx:statistics quartileMethod="exclusive"/>
+          </cx:layoutPr>
+        </cx:series>
+        <cx:series layoutId="boxWhisker" formatIdx="2">
+          <cx:tx>
+            <cx:txData>
+              <cx:v>Series 3</cx:v>
+            </cx:txData>
+          </cx:tx>
+          <cx:dataId val="2"/>
+          <cx:layoutPr>
+            <cx:statistics quartileMethod="exclusive"/>
+          </cx:layoutPr>
+        </cx:series>
+      </cx:plotAreaRegion>
+    </cx:plotArea>
+  </cx:chart>
+</cx:chartSpace>
+</file>
+
+<file path=ppt/charts/chartEx6.xml><?xml version="1.0" encoding="utf-8"?>
+<cx:chartSpace xmlns:cx="http://schemas.microsoft.com/office/drawing/2014/chartex" xmlns:a="http://schemas.openxmlformats.org/drawingml/2006/main" xmlns:r="http://schemas.openxmlformats.org/officeDocument/2006/relationships">
+  <cx:chartData>
+    <cx:data id="0">
+      <cx:strDim type="cat">
+        <cx:lvl ptCount="5">
+          <cx:pt idx="0">Point 1</cx:pt>
+          <cx:pt idx="1">Point 2</cx:pt>
+          <cx:pt idx="2">Point 3</cx:pt>
+          <cx:pt idx="3">Point 4</cx:pt>
+          <cx:pt idx="4">Point 5</cx:pt>
+        </cx:lvl>
+      </cx:strDim>
+      <cx:numDim type="val">
+        <cx:lvl ptCount="5">
+          <cx:pt idx="0">10</cx:pt>
+          <cx:pt idx="1">-3</cx:pt>
+          <cx:pt idx="2">6</cx:pt>
+          <cx:pt idx="3">-2</cx:pt>
+          <cx:pt idx="4">11</cx:pt>
+        </cx:lvl>
+      </cx:numDim>
+    </cx:data>
+  </cx:chartData>
+  <cx:chart>
+    <cx:title>
+      <cx:tx>
+        <cx:rich>
+          <a:bodyPr/>
+          <a:p>
+            <a:r>
+              <a:t>waterfall</a:t>
+            </a:r>
+          </a:p>
+        </cx:rich>
+      </cx:tx>
+    </cx:title>
+    <cx:plotArea>
+      <cx:plotAreaRegion>
+        <cx:series layoutId="waterfall" formatIdx="0">
+          <cx:tx>
+            <cx:txData>
+              <cx:v>Series 1</cx:v>
+            </cx:txData>
+          </cx:tx>
+          <cx:dataId val="0"/>
+          <cx:layoutPr>
+            <cx:subtotals>
+              <cx:idx val="0"/>
+              <cx:idx val="4"/>
+            </cx:subtotals>
+          </cx:layoutPr>
+        </cx:series>
+      </cx:plotAreaRegion>
+    </cx:plotArea>
+  </cx:chart>
+</cx:chartSpace>
+</file>
+
+<file path=ppt/charts/chartEx7.xml><?xml version="1.0" encoding="utf-8"?>
+<cx:chartSpace xmlns:cx="http://schemas.microsoft.com/office/drawing/2014/chartex" xmlns:a="http://schemas.openxmlformats.org/drawingml/2006/main" xmlns:r="http://schemas.openxmlformats.org/officeDocument/2006/relationships">
+  <cx:chartData>
+    <cx:data id="0">
+      <cx:strDim type="cat">
+        <cx:lvl ptCount="10">
+          <cx:pt idx="0">Point 1</cx:pt>
+          <cx:pt idx="1">Point 2</cx:pt>
+          <cx:pt idx="2">Point 3</cx:pt>
+          <cx:pt idx="3">Point 4</cx:pt>
+          <cx:pt idx="4">Point 5</cx:pt>
+          <cx:pt idx="5">Point 6</cx:pt>
+          <cx:pt idx="6">Point 7</cx:pt>
+          <cx:pt idx="7">Point 8</cx:pt>
+          <cx:pt idx="8">Point 9</cx:pt>
+          <cx:pt idx="9">Point 10</cx:pt>
+        </cx:lvl>
+      </cx:strDim>
+      <cx:numDim type="val">
+        <cx:lvl ptCount="10">
+          <cx:pt idx="0">1</cx:pt>
+          <cx:pt idx="1">1</cx:pt>
+          <cx:pt idx="2">2</cx:pt>
+          <cx:pt idx="3">3</cx:pt>
+          <cx:pt idx="4">3</cx:pt>
+          <cx:pt idx="5">3</cx:pt>
+          <cx:pt idx="6">4</cx:pt>
+          <cx:pt idx="7">4</cx:pt>
+          <cx:pt idx="8">5</cx:pt>
+          <cx:pt idx="9">8</cx:pt>
+        </cx:lvl>
+      </cx:numDim>
+    </cx:data>
+  </cx:chartData>
+  <cx:chart>
+    <cx:title>
+      <cx:tx>
+        <cx:rich>
+          <a:bodyPr/>
+          <a:p>
+            <a:r>
+              <a:t>funnel</a:t>
+            </a:r>
+          </a:p>
+        </cx:rich>
+      </cx:tx>
+    </cx:title>
+    <cx:plotArea>
+      <cx:plotAreaRegion>
+        <cx:series layoutId="funnel" formatIdx="0">
+          <cx:tx>
+            <cx:txData>
+              <cx:v>Series 1</cx:v>
+            </cx:txData>
+          </cx:tx>
+          <cx:dataId val="0"/>
+          <cx:layoutPr/>
+        </cx:series>
+      </cx:plotAreaRegion>
+    </cx:plotArea>
+  </cx:chart>
+</cx:chartSpace>
+</file>
+
+<file path=ppt/charts/chartEx8.xml><?xml version="1.0" encoding="utf-8"?>
+<cx:chartSpace xmlns:cx="http://schemas.microsoft.com/office/drawing/2014/chartex" xmlns:a="http://schemas.openxmlformats.org/drawingml/2006/main" xmlns:r="http://schemas.openxmlformats.org/officeDocument/2006/relationships">
+  <cx:chartData>
+    <cx:data id="0">
+      <cx:strDim type="cat">
+        <cx:lvl ptCount="10">
+          <cx:pt idx="0">Point 1</cx:pt>
+          <cx:pt idx="1">Point 2</cx:pt>
+          <cx:pt idx="2">Point 3</cx:pt>
+          <cx:pt idx="3">Point 4</cx:pt>
+          <cx:pt idx="4">Point 5</cx:pt>
+          <cx:pt idx="5">Point 6</cx:pt>
+          <cx:pt idx="6">Point 7</cx:pt>
+          <cx:pt idx="7">Point 8</cx:pt>
+          <cx:pt idx="8">Point 9</cx:pt>
+          <cx:pt idx="9">Point 10</cx:pt>
+        </cx:lvl>
+      </cx:strDim>
+      <cx:numDim type="val">
+        <cx:lvl ptCount="10">
+          <cx:pt idx="0">1</cx:pt>
+          <cx:pt idx="1">1</cx:pt>
+          <cx:pt idx="2">2</cx:pt>
+          <cx:pt idx="3">3</cx:pt>
+          <cx:pt idx="4">3</cx:pt>
+          <cx:pt idx="5">3</cx:pt>
+          <cx:pt idx="6">4</cx:pt>
+          <cx:pt idx="7">4</cx:pt>
+          <cx:pt idx="8">5</cx:pt>
+          <cx:pt idx="9">8</cx:pt>
+        </cx:lvl>
+      </cx:numDim>
+    </cx:data>
+  </cx:chartData>
+  <cx:chart>
+    <cx:title>
+      <cx:tx>
+        <cx:rich>
+          <a:bodyPr/>
+          <a:p>
+            <a:r>
+              <a:t>regionMap</a:t>
+            </a:r>
+          </a:p>
+        </cx:rich>
+      </cx:tx>
+    </cx:title>
+    <cx:plotArea>
+      <cx:plotAreaRegion>
+        <cx:series layoutId="regionMap" formatIdx="0">
+          <cx:tx>
+            <cx:txData>
+              <cx:v>Series 1</cx:v>
+            </cx:txData>
+          </cx:tx>
+          <cx:dataId val="0"/>
+          <cx:layoutPr/>
+        </cx:series>
+      </cx:plotAreaRegion>
+    </cx:plotArea>
+  </cx:chart>
+</cx:chartSpace>
+</file>
+
+<file path=ppt/comments/comment1.xml><?xml version="1.0" encoding="utf-8"?>
+<p:cmLst xmlns:p="http://schemas.openxmlformats.org/presentationml/2006/main">
+  <p:cm authorId="0" dt="2026-01-02T03:04:05Z" idx="1">
+    <p:pos x="952500" y="952500"/>
+    <p:text>第一条 &lt;script&gt; &amp; English</p:text>
+    <p:extLst>
+      <p:ext uri="comments-fixture">
+        <keep:data xmlns:keep="urn:comments-test"/>
+      </p:ext>
+    </p:extLst>
+  </p:cm>
+  <p:cm authorId="1" idx="1">
+    <p:pos x="-95250" y="4762500"/>
+    <p:text>第二条
+保留换行</p:text>
+  </p:cm>
+</p:cmLst>
+</file>
+
+<file path=ppt/comments/comment2.xml><?xml version="1.0" encoding="utf-8"?>
+<p:cmLst xmlns:p="http://schemas.openxmlformats.org/presentationml/2006/main">
+  <p:cm authorId="0" idx="3">
+    <p:pos x="1905000" y="1905000"/>
+    <p:text>跨页批注</p:text>
+  </p:cm>
+</p:cmLst>
 </file>
 
 <file path=ppt/slideLayouts/slideLayout1.xml><?xml version="1.0" encoding="utf-8"?>
@@ -4513,6 +5085,50 @@
           </a:graphicData>
         </a:graphic>
       </p:graphicFrame>
+      <mc:AlternateContent xmlns:mc="http://schemas.openxmlformats.org/markup-compatibility/2006" xmlns:modern="http://schemas.microsoft.com/office/drawing/2015/10/21/chartex">
+        <mc:Choice Requires="modern">
+          <p:graphicFrame>
+            <p:nvGraphicFramePr>
+              <p:cNvPr id="906" name="sunburst"/>
+              <p:cNvGraphicFramePr/>
+              <p:nvPr/>
+            </p:nvGraphicFramePr>
+            <p:xfrm>
+              <a:off x="285750" y="285750"/>
+              <a:ext cx="5524500" cy="3429000"/>
+            </p:xfrm>
+            <a:graphic>
+              <a:graphicData uri="http://schemas.microsoft.com/office/drawing/2014/chartex">
+                <cx:chart xmlns:cx="http://schemas.microsoft.com/office/drawing/2014/chartex" r:id="rIdModern"/>
+              </a:graphicData>
+            </a:graphic>
+          </p:graphicFrame>
+        </mc:Choice>
+        <mc:Fallback>
+          <p:pic>
+            <p:nvPicPr>
+              <p:cNvPr id="906" name="sunburst"/>
+              <p:cNvPicPr/>
+              <p:nvPr/>
+            </p:nvPicPr>
+            <p:blipFill>
+              <a:blip r:embed="rIdModernPreview"/>
+              <a:stretch>
+                <a:fillRect/>
+              </a:stretch>
+            </p:blipFill>
+            <p:spPr>
+              <a:xfrm>
+                <a:off x="285750" y="285750"/>
+                <a:ext cx="5524500" cy="3429000"/>
+              </a:xfrm>
+              <a:prstGeom prst="rect">
+                <a:avLst/>
+              </a:prstGeom>
+            </p:spPr>
+          </p:pic>
+        </mc:Fallback>
+      </mc:AlternateContent>
     </p:spTree>
   </p:cSld>
   <p:clrMapOvr>
@@ -4579,6 +5195,50 @@
           </a:graphicData>
         </a:graphic>
       </p:graphicFrame>
+      <mc:AlternateContent xmlns:mc="http://schemas.openxmlformats.org/markup-compatibility/2006" xmlns:modern="http://schemas.microsoft.com/office/drawing/2015/10/21/chartex">
+        <mc:Choice Requires="modern">
+          <p:graphicFrame>
+            <p:nvGraphicFramePr>
+              <p:cNvPr id="906" name="histogram"/>
+              <p:cNvGraphicFramePr/>
+              <p:nvPr/>
+            </p:nvGraphicFramePr>
+            <p:xfrm>
+              <a:off x="285750" y="285750"/>
+              <a:ext cx="5524500" cy="3429000"/>
+            </p:xfrm>
+            <a:graphic>
+              <a:graphicData uri="http://schemas.microsoft.com/office/drawing/2014/chartex">
+                <cx:chart xmlns:cx="http://schemas.microsoft.com/office/drawing/2014/chartex" r:id="rIdModern"/>
+              </a:graphicData>
+            </a:graphic>
+          </p:graphicFrame>
+        </mc:Choice>
+        <mc:Fallback>
+          <p:pic>
+            <p:nvPicPr>
+              <p:cNvPr id="906" name="histogram"/>
+              <p:cNvPicPr/>
+              <p:nvPr/>
+            </p:nvPicPr>
+            <p:blipFill>
+              <a:blip r:embed="rIdModernPreview"/>
+              <a:stretch>
+                <a:fillRect/>
+              </a:stretch>
+            </p:blipFill>
+            <p:spPr>
+              <a:xfrm>
+                <a:off x="285750" y="285750"/>
+                <a:ext cx="5524500" cy="3429000"/>
+              </a:xfrm>
+              <a:prstGeom prst="rect">
+                <a:avLst/>
+              </a:prstGeom>
+            </p:spPr>
+          </p:pic>
+        </mc:Fallback>
+      </mc:AlternateContent>
     </p:spTree>
   </p:cSld>
   <p:clrMapOvr>
@@ -4661,6 +5321,50 @@
           </a:graphicData>
         </a:graphic>
       </p:graphicFrame>
+      <mc:AlternateContent xmlns:mc="http://schemas.openxmlformats.org/markup-compatibility/2006" xmlns:modern="http://schemas.microsoft.com/office/drawing/2015/10/21/chartex">
+        <mc:Choice Requires="modern">
+          <p:graphicFrame>
+            <p:nvGraphicFramePr>
+              <p:cNvPr id="906" name="pareto"/>
+              <p:cNvGraphicFramePr/>
+              <p:nvPr/>
+            </p:nvGraphicFramePr>
+            <p:xfrm>
+              <a:off x="285750" y="285750"/>
+              <a:ext cx="5524500" cy="3429000"/>
+            </p:xfrm>
+            <a:graphic>
+              <a:graphicData uri="http://schemas.microsoft.com/office/drawing/2014/chartex">
+                <cx:chart xmlns:cx="http://schemas.microsoft.com/office/drawing/2014/chartex" r:id="rIdModern"/>
+              </a:graphicData>
+            </a:graphic>
+          </p:graphicFrame>
+        </mc:Choice>
+        <mc:Fallback>
+          <p:pic>
+            <p:nvPicPr>
+              <p:cNvPr id="906" name="pareto"/>
+              <p:cNvPicPr/>
+              <p:nvPr/>
+            </p:nvPicPr>
+            <p:blipFill>
+              <a:blip r:embed="rIdModernPreview"/>
+              <a:stretch>
+                <a:fillRect/>
+              </a:stretch>
+            </p:blipFill>
+            <p:spPr>
+              <a:xfrm>
+                <a:off x="285750" y="285750"/>
+                <a:ext cx="5524500" cy="3429000"/>
+              </a:xfrm>
+              <a:prstGeom prst="rect">
+                <a:avLst/>
+              </a:prstGeom>
+            </p:spPr>
+          </p:pic>
+        </mc:Fallback>
+      </mc:AlternateContent>
     </p:spTree>
   </p:cSld>
   <p:clrMapOvr>
@@ -4727,6 +5431,50 @@
           </a:graphicData>
         </a:graphic>
       </p:graphicFrame>
+      <mc:AlternateContent xmlns:mc="http://schemas.openxmlformats.org/markup-compatibility/2006" xmlns:modern="http://schemas.microsoft.com/office/drawing/2015/10/21/chartex">
+        <mc:Choice Requires="modern">
+          <p:graphicFrame>
+            <p:nvGraphicFramePr>
+              <p:cNvPr id="906" name="boxWhisker"/>
+              <p:cNvGraphicFramePr/>
+              <p:nvPr/>
+            </p:nvGraphicFramePr>
+            <p:xfrm>
+              <a:off x="285750" y="285750"/>
+              <a:ext cx="5524500" cy="3429000"/>
+            </p:xfrm>
+            <a:graphic>
+              <a:graphicData uri="http://schemas.microsoft.com/office/drawing/2014/chartex">
+                <cx:chart xmlns:cx="http://schemas.microsoft.com/office/drawing/2014/chartex" r:id="rIdModern"/>
+              </a:graphicData>
+            </a:graphic>
+          </p:graphicFrame>
+        </mc:Choice>
+        <mc:Fallback>
+          <p:pic>
+            <p:nvPicPr>
+              <p:cNvPr id="906" name="boxWhisker"/>
+              <p:cNvPicPr/>
+              <p:nvPr/>
+            </p:nvPicPr>
+            <p:blipFill>
+              <a:blip r:embed="rIdModernPreview"/>
+              <a:stretch>
+                <a:fillRect/>
+              </a:stretch>
+            </p:blipFill>
+            <p:spPr>
+              <a:xfrm>
+                <a:off x="285750" y="285750"/>
+                <a:ext cx="5524500" cy="3429000"/>
+              </a:xfrm>
+              <a:prstGeom prst="rect">
+                <a:avLst/>
+              </a:prstGeom>
+            </p:spPr>
+          </p:pic>
+        </mc:Fallback>
+      </mc:AlternateContent>
     </p:spTree>
   </p:cSld>
   <p:clrMapOvr>
@@ -4809,6 +5557,50 @@
           </a:graphicData>
         </a:graphic>
       </p:graphicFrame>
+      <mc:AlternateContent xmlns:mc="http://schemas.openxmlformats.org/markup-compatibility/2006" xmlns:modern="http://schemas.microsoft.com/office/drawing/2015/10/21/chartex">
+        <mc:Choice Requires="modern">
+          <p:graphicFrame>
+            <p:nvGraphicFramePr>
+              <p:cNvPr id="906" name="waterfall"/>
+              <p:cNvGraphicFramePr/>
+              <p:nvPr/>
+            </p:nvGraphicFramePr>
+            <p:xfrm>
+              <a:off x="285750" y="285750"/>
+              <a:ext cx="5524500" cy="3429000"/>
+            </p:xfrm>
+            <a:graphic>
+              <a:graphicData uri="http://schemas.microsoft.com/office/drawing/2014/chartex">
+                <cx:chart xmlns:cx="http://schemas.microsoft.com/office/drawing/2014/chartex" r:id="rIdModern"/>
+              </a:graphicData>
+            </a:graphic>
+          </p:graphicFrame>
+        </mc:Choice>
+        <mc:Fallback>
+          <p:pic>
+            <p:nvPicPr>
+              <p:cNvPr id="906" name="waterfall"/>
+              <p:cNvPicPr/>
+              <p:nvPr/>
+            </p:nvPicPr>
+            <p:blipFill>
+              <a:blip r:embed="rIdModernPreview"/>
+              <a:stretch>
+                <a:fillRect/>
+              </a:stretch>
+            </p:blipFill>
+            <p:spPr>
+              <a:xfrm>
+                <a:off x="285750" y="285750"/>
+                <a:ext cx="5524500" cy="3429000"/>
+              </a:xfrm>
+              <a:prstGeom prst="rect">
+                <a:avLst/>
+              </a:prstGeom>
+            </p:spPr>
+          </p:pic>
+        </mc:Fallback>
+      </mc:AlternateContent>
     </p:spTree>
   </p:cSld>
   <p:clrMapOvr>
@@ -4891,6 +5683,50 @@
           </a:graphicData>
         </a:graphic>
       </p:graphicFrame>
+      <mc:AlternateContent xmlns:mc="http://schemas.openxmlformats.org/markup-compatibility/2006" xmlns:modern="http://schemas.microsoft.com/office/drawing/2015/10/21/chartex">
+        <mc:Choice Requires="modern">
+          <p:graphicFrame>
+            <p:nvGraphicFramePr>
+              <p:cNvPr id="906" name="funnel"/>
+              <p:cNvGraphicFramePr/>
+              <p:nvPr/>
+            </p:nvGraphicFramePr>
+            <p:xfrm>
+              <a:off x="285750" y="285750"/>
+              <a:ext cx="5524500" cy="3429000"/>
+            </p:xfrm>
+            <a:graphic>
+              <a:graphicData uri="http://schemas.microsoft.com/office/drawing/2014/chartex">
+                <cx:chart xmlns:cx="http://schemas.microsoft.com/office/drawing/2014/chartex" r:id="rIdModern"/>
+              </a:graphicData>
+            </a:graphic>
+          </p:graphicFrame>
+        </mc:Choice>
+        <mc:Fallback>
+          <p:pic>
+            <p:nvPicPr>
+              <p:cNvPr id="906" name="funnel"/>
+              <p:cNvPicPr/>
+              <p:nvPr/>
+            </p:nvPicPr>
+            <p:blipFill>
+              <a:blip r:embed="rIdModernPreview"/>
+              <a:stretch>
+                <a:fillRect/>
+              </a:stretch>
+            </p:blipFill>
+            <p:spPr>
+              <a:xfrm>
+                <a:off x="285750" y="285750"/>
+                <a:ext cx="5524500" cy="3429000"/>
+              </a:xfrm>
+              <a:prstGeom prst="rect">
+                <a:avLst/>
+              </a:prstGeom>
+            </p:spPr>
+          </p:pic>
+        </mc:Fallback>
+      </mc:AlternateContent>
     </p:spTree>
   </p:cSld>
   <p:clrMapOvr>
@@ -4957,6 +5793,50 @@
           </a:graphicData>
         </a:graphic>
       </p:graphicFrame>
+      <mc:AlternateContent xmlns:mc="http://schemas.openxmlformats.org/markup-compatibility/2006" xmlns:modern="http://schemas.microsoft.com/office/drawing/2015/10/21/chartex">
+        <mc:Choice Requires="modern">
+          <p:graphicFrame>
+            <p:nvGraphicFramePr>
+              <p:cNvPr id="906" name="regionMap"/>
+              <p:cNvGraphicFramePr/>
+              <p:nvPr/>
+            </p:nvGraphicFramePr>
+            <p:xfrm>
+              <a:off x="285750" y="285750"/>
+              <a:ext cx="5524500" cy="3429000"/>
+            </p:xfrm>
+            <a:graphic>
+              <a:graphicData uri="http://schemas.microsoft.com/office/drawing/2014/chartex">
+                <cx:chart xmlns:cx="http://schemas.microsoft.com/office/drawing/2014/chartex" r:id="rIdModern"/>
+              </a:graphicData>
+            </a:graphic>
+          </p:graphicFrame>
+        </mc:Choice>
+        <mc:Fallback>
+          <p:pic>
+            <p:nvPicPr>
+              <p:cNvPr id="906" name="regionMap"/>
+              <p:cNvPicPr/>
+              <p:nvPr/>
+            </p:nvPicPr>
+            <p:blipFill>
+              <a:blip r:embed="rIdModernPreview"/>
+              <a:stretch>
+                <a:fillRect/>
+              </a:stretch>
+            </p:blipFill>
+            <p:spPr>
+              <a:xfrm>
+                <a:off x="285750" y="285750"/>
+                <a:ext cx="5524500" cy="3429000"/>
+              </a:xfrm>
+              <a:prstGeom prst="rect">
+                <a:avLst/>
+              </a:prstGeom>
+            </p:spPr>
+          </p:pic>
+        </mc:Fallback>
+      </mc:AlternateContent>
     </p:spTree>
   </p:cSld>
   <p:clrMapOvr>
@@ -5039,6 +5919,206 @@
           </a:graphicData>
         </a:graphic>
       </p:graphicFrame>
+      <p:sp>
+        <p:nvSpPr>
+          <p:cNvPr id="101" name="plain-shape"/>
+          <p:cNvSpPr/>
+          <p:nvPr/>
+        </p:nvSpPr>
+        <p:spPr>
+          <a:xfrm>
+            <a:off x="381000" y="381000"/>
+            <a:ext cx="1905000" cy="952500"/>
+          </a:xfrm>
+          <a:prstGeom prst="rect">
+            <a:avLst/>
+          </a:prstGeom>
+          <a:solidFill>
+            <a:srgbClr val="4285F4"/>
+          </a:solidFill>
+        </p:spPr>
+        <p:txBody>
+          <a:bodyPr anchor="ctr"/>
+          <a:lstStyle/>
+          <a:p>
+            <a:endParaRPr/>
+          </a:p>
+        </p:txBody>
+      </p:sp>
+      <p:sp>
+        <p:nvSpPr>
+          <p:cNvPr id="102" name="rich-shape"/>
+          <p:cNvSpPr/>
+          <p:nvPr/>
+        </p:nvSpPr>
+        <p:spPr>
+          <a:xfrm>
+            <a:off x="3238500" y="381000"/>
+            <a:ext cx="1905000" cy="952500"/>
+          </a:xfrm>
+          <a:prstGeom prst="rect">
+            <a:avLst/>
+          </a:prstGeom>
+          <a:solidFill>
+            <a:srgbClr val="F97316"/>
+          </a:solidFill>
+          <a:scene3d>
+            <a:camera prst="orthographicFront"/>
+            <a:lightRig rig="threePt" dir="t"/>
+          </a:scene3d>
+          <a:sp3d extrusionH="95250" prstMaterial="metal">
+            <a:bevelT w="38100" h="38100"/>
+          </a:sp3d>
+        </p:spPr>
+        <p:txBody>
+          <a:bodyPr anchor="ctr"/>
+          <a:lstStyle/>
+          <a:p>
+            <a:endParaRPr/>
+          </a:p>
+        </p:txBody>
+      </p:sp>
+      <p:pic>
+        <p:nvPicPr>
+          <p:cNvPr id="901" name="picture-901" descr="灰阶渐变图片"/>
+          <p:cNvPicPr/>
+          <p:nvPr/>
+        </p:nvPicPr>
+        <p:blipFill>
+          <a:blip r:embed="rIdMixedImage">
+            <a:extLst>
+              <a:ext uri="appearance-test">
+                <test:keep xmlns:test="urn:appearance"/>
+              </a:ext>
+            </a:extLst>
+          </a:blip>
+          <a:srcRect l="10000"/>
+          <a:stretch>
+            <a:fillRect/>
+          </a:stretch>
+        </p:blipFill>
+        <p:spPr>
+          <a:xfrm>
+            <a:off x="381000" y="1714500"/>
+            <a:ext cx="1524000" cy="952500"/>
+          </a:xfrm>
+          <a:prstGeom prst="rect">
+            <a:avLst/>
+          </a:prstGeom>
+        </p:spPr>
+      </p:pic>
+      <p:pic>
+        <p:nvPicPr>
+          <p:cNvPr id="902" name="picture-902" descr="灰阶渐变图片"/>
+          <p:cNvPicPr/>
+          <p:nvPr/>
+        </p:nvPicPr>
+        <p:blipFill>
+          <a:blip r:embed="rIdMixedImage">
+            <a:alphaModFix amt="60000"/>
+            <a:grayscl/>
+            <a:extLst>
+              <a:ext uri="appearance-test">
+                <test:keep xmlns:test="urn:appearance"/>
+              </a:ext>
+            </a:extLst>
+          </a:blip>
+          <a:srcRect l="10000"/>
+          <a:stretch>
+            <a:fillRect/>
+          </a:stretch>
+        </p:blipFill>
+        <p:spPr>
+          <a:xfrm>
+            <a:off x="2286000" y="1714500"/>
+            <a:ext cx="1524000" cy="952500"/>
+          </a:xfrm>
+          <a:prstGeom prst="rect">
+            <a:avLst/>
+          </a:prstGeom>
+        </p:spPr>
+      </p:pic>
+      <p:pic>
+        <p:nvPicPr>
+          <p:cNvPr id="903" name="picture-903" descr="灰阶渐变图片"/>
+          <p:cNvPicPr/>
+          <p:nvPr/>
+        </p:nvPicPr>
+        <p:blipFill>
+          <a:blip r:embed="rIdMixedImage">
+            <a:duotone>
+              <a:srgbClr val="112233"/>
+              <a:srgbClr val="FFEEDD"/>
+            </a:duotone>
+            <a:extLst>
+              <a:ext uri="appearance-test">
+                <test:keep xmlns:test="urn:appearance"/>
+              </a:ext>
+            </a:extLst>
+          </a:blip>
+          <a:srcRect l="10000"/>
+          <a:stretch>
+            <a:fillRect/>
+          </a:stretch>
+        </p:blipFill>
+        <p:spPr>
+          <a:xfrm>
+            <a:off x="4191000" y="1714500"/>
+            <a:ext cx="1524000" cy="952500"/>
+          </a:xfrm>
+          <a:prstGeom prst="rect">
+            <a:avLst/>
+          </a:prstGeom>
+        </p:spPr>
+      </p:pic>
+      <p:pic>
+        <p:nvPicPr>
+          <p:cNvPr id="970" name="mixed-audio"/>
+          <p:cNvPicPr/>
+          <p:nvPr>
+            <a:audioFile r:link="rIdMixedaudio"/>
+          </p:nvPr>
+        </p:nvPicPr>
+        <p:blipFill>
+          <a:blip r:embed="rIdMixedPoster"/>
+          <a:stretch>
+            <a:fillRect/>
+          </a:stretch>
+        </p:blipFill>
+        <p:spPr>
+          <a:xfrm>
+            <a:off x="6858000" y="4953000"/>
+            <a:ext cx="1143000" cy="762000"/>
+          </a:xfrm>
+          <a:prstGeom prst="rect">
+            <a:avLst/>
+          </a:prstGeom>
+        </p:spPr>
+      </p:pic>
+      <p:pic>
+        <p:nvPicPr>
+          <p:cNvPr id="971" name="mixed-video"/>
+          <p:cNvPicPr/>
+          <p:nvPr>
+            <a:videoFile r:link="rIdMixedvideo"/>
+          </p:nvPr>
+        </p:nvPicPr>
+        <p:blipFill>
+          <a:blip r:embed="rIdMixedPoster"/>
+          <a:stretch>
+            <a:fillRect/>
+          </a:stretch>
+        </p:blipFill>
+        <p:spPr>
+          <a:xfrm>
+            <a:off x="8382000" y="4953000"/>
+            <a:ext cx="1143000" cy="762000"/>
+          </a:xfrm>
+          <a:prstGeom prst="rect">
+            <a:avLst/>
+          </a:prstGeom>
+        </p:spPr>
+      </p:pic>
     </p:spTree>
   </p:cSld>
   <p:clrMapOvr>
